--- a/Studiodontho.pptx
+++ b/Studiodontho.pptx
@@ -4125,12 +4125,76 @@
               </a:defRPr>
             </a:pPr>
             <a:r>
-              <a:rPr sz="1425">
+              <a:rPr sz="1425" dirty="0" err="1">
                 <a:solidFill>
                   <a:srgbClr val="09244D"/>
                 </a:solidFill>
               </a:rPr>
-              <a:t>Comptes : prénom, email, mot de passe hashé, mode actuel, photo.</a:t>
+              <a:t>Comptes</a:t>
+            </a:r>
+            <a:r>
+              <a:rPr sz="1425" dirty="0">
+                <a:solidFill>
+                  <a:srgbClr val="09244D"/>
+                </a:solidFill>
+              </a:rPr>
+              <a:t> : </a:t>
+            </a:r>
+            <a:r>
+              <a:rPr lang="fr-FR" sz="1425" dirty="0">
+                <a:solidFill>
+                  <a:srgbClr val="09244D"/>
+                </a:solidFill>
+              </a:rPr>
+              <a:t>id, </a:t>
+            </a:r>
+            <a:r>
+              <a:rPr sz="1425" dirty="0" err="1">
+                <a:solidFill>
+                  <a:srgbClr val="09244D"/>
+                </a:solidFill>
+              </a:rPr>
+              <a:t>prénom</a:t>
+            </a:r>
+            <a:r>
+              <a:rPr sz="1425" dirty="0">
+                <a:solidFill>
+                  <a:srgbClr val="09244D"/>
+                </a:solidFill>
+              </a:rPr>
+              <a:t>, email, mot de passe </a:t>
+            </a:r>
+            <a:r>
+              <a:rPr sz="1425" dirty="0" err="1">
+                <a:solidFill>
+                  <a:srgbClr val="09244D"/>
+                </a:solidFill>
+              </a:rPr>
+              <a:t>hashé</a:t>
+            </a:r>
+            <a:r>
+              <a:rPr sz="1425" dirty="0">
+                <a:solidFill>
+                  <a:srgbClr val="09244D"/>
+                </a:solidFill>
+              </a:rPr>
+              <a:t>, mode </a:t>
+            </a:r>
+            <a:r>
+              <a:rPr sz="1425" dirty="0" err="1">
+                <a:solidFill>
+                  <a:srgbClr val="09244D"/>
+                </a:solidFill>
+              </a:rPr>
+              <a:t>actuel</a:t>
+            </a:r>
+            <a:r>
+              <a:rPr sz="1425" dirty="0">
+                <a:solidFill>
+                  <a:srgbClr val="09244D"/>
+                </a:solidFill>
+              </a:rPr>
+              <a:t>, photo.</a:t>
             </a:r>
           </a:p>
         </p:txBody>
@@ -4593,56 +4657,6 @@
                 </a:solidFill>
               </a:rPr>
               <a:t>Connexion : session stockée côté serveur avec expiration.</a:t>
-            </a:r>
-          </a:p>
-        </p:txBody>
-      </p:sp>
-      <p:sp>
-        <p:nvSpPr>
-          <p:cNvPr id="17" name="Rectangle 16">
-            <a:extLst>
-              <a:ext uri="{FF2B5EF4-FFF2-40B4-BE49-F238E27FC236}">
-                <a16:creationId xmlns:a16="http://schemas.microsoft.com/office/drawing/2014/main" id="{0152D5C8-7EC0-42B3-AC53-941DFEA7ECAA}"/>
-              </a:ext>
-            </a:extLst>
-          </p:cNvPr>
-          <p:cNvSpPr>
-            <a:spLocks noGrp="1"/>
-          </p:cNvSpPr>
-          <p:nvPr/>
-        </p:nvSpPr>
-        <p:spPr>
-          <a:xfrm>
-            <a:off x="1066800" y="5619750"/>
-            <a:ext cx="9525000" cy="323850"/>
-          </a:xfrm>
-          <a:prstGeom prst="rect">
-            <a:avLst/>
-          </a:prstGeom>
-          <a:noFill/>
-          <a:ln w="0">
-            <a:noFill/>
-            <a:prstDash val="solid"/>
-          </a:ln>
-        </p:spPr>
-        <p:txBody>
-          <a:bodyPr/>
-          <a:lstStyle/>
-          <a:p>
-            <a:pPr algn="ctr">
-              <a:defRPr sz="1800" b="1">
-                <a:solidFill>
-                  <a:srgbClr val="073B7A"/>
-                </a:solidFill>
-              </a:defRPr>
-            </a:pPr>
-            <a:r>
-              <a:rPr sz="1800" b="1">
-                <a:solidFill>
-                  <a:srgbClr val="073B7A"/>
-                </a:solidFill>
-              </a:rPr>
-              <a:t>Les points sont calculés depuis path_progress : chemins validés x 10.</a:t>
             </a:r>
           </a:p>
         </p:txBody>
@@ -12140,56 +12154,6 @@
       </p:sp>
       <p:sp>
         <p:nvSpPr>
-          <p:cNvPr id="4" name="Rectangle 3">
-            <a:extLst>
-              <a:ext uri="{FF2B5EF4-FFF2-40B4-BE49-F238E27FC236}">
-                <a16:creationId xmlns:a16="http://schemas.microsoft.com/office/drawing/2014/main" id="{24699937-1A7A-4FA8-B84E-DD203FB68168}"/>
-              </a:ext>
-            </a:extLst>
-          </p:cNvPr>
-          <p:cNvSpPr>
-            <a:spLocks noGrp="1"/>
-          </p:cNvSpPr>
-          <p:nvPr/>
-        </p:nvSpPr>
-        <p:spPr>
-          <a:xfrm>
-            <a:off x="742950" y="1409700"/>
-            <a:ext cx="9334500" cy="400050"/>
-          </a:xfrm>
-          <a:prstGeom prst="rect">
-            <a:avLst/>
-          </a:prstGeom>
-          <a:noFill/>
-          <a:ln w="0">
-            <a:noFill/>
-            <a:prstDash val="solid"/>
-          </a:ln>
-        </p:spPr>
-        <p:txBody>
-          <a:bodyPr/>
-          <a:lstStyle/>
-          <a:p>
-            <a:pPr>
-              <a:defRPr sz="1650">
-                <a:solidFill>
-                  <a:srgbClr val="607086"/>
-                </a:solidFill>
-              </a:defRPr>
-            </a:pPr>
-            <a:r>
-              <a:rPr sz="1650">
-                <a:solidFill>
-                  <a:srgbClr val="607086"/>
-                </a:solidFill>
-              </a:rPr>
-              <a:t>L’interface devait ressembler à une application mobile, pas à un site vitrine.</a:t>
-            </a:r>
-          </a:p>
-        </p:txBody>
-      </p:sp>
-      <p:sp>
-        <p:nvSpPr>
           <p:cNvPr id="5" name="Ellipse 4">
             <a:extLst>
               <a:ext uri="{FF2B5EF4-FFF2-40B4-BE49-F238E27FC236}">
@@ -12459,96 +12423,6 @@
                 </a:solidFill>
               </a:rPr>
               <a:t>Transitions fluides entre les pages pour garder une sensation d’application.</a:t>
-            </a:r>
-          </a:p>
-        </p:txBody>
-      </p:sp>
-      <p:sp>
-        <p:nvSpPr>
-          <p:cNvPr id="11" name="Ellipse 10">
-            <a:extLst>
-              <a:ext uri="{FF2B5EF4-FFF2-40B4-BE49-F238E27FC236}">
-                <a16:creationId xmlns:a16="http://schemas.microsoft.com/office/drawing/2014/main" id="{220607F6-A05D-4B76-A810-6C8BBB5F91D8}"/>
-              </a:ext>
-            </a:extLst>
-          </p:cNvPr>
-          <p:cNvSpPr>
-            <a:spLocks noGrp="1"/>
-          </p:cNvSpPr>
-          <p:nvPr/>
-        </p:nvSpPr>
-        <p:spPr>
-          <a:xfrm>
-            <a:off x="838200" y="3914775"/>
-            <a:ext cx="133350" cy="133350"/>
-          </a:xfrm>
-          <a:prstGeom prst="ellipse">
-            <a:avLst/>
-          </a:prstGeom>
-          <a:solidFill>
-            <a:srgbClr val="0EA5A8"/>
-          </a:solidFill>
-          <a:ln w="9525">
-            <a:solidFill>
-              <a:srgbClr val="0EA5A8"/>
-            </a:solidFill>
-            <a:prstDash val="solid"/>
-          </a:ln>
-        </p:spPr>
-        <p:txBody>
-          <a:bodyPr/>
-          <a:lstStyle/>
-          <a:p>
-            <a:endParaRPr lang="fr-FR"/>
-          </a:p>
-        </p:txBody>
-      </p:sp>
-      <p:sp>
-        <p:nvSpPr>
-          <p:cNvPr id="12" name="Rectangle 11">
-            <a:extLst>
-              <a:ext uri="{FF2B5EF4-FFF2-40B4-BE49-F238E27FC236}">
-                <a16:creationId xmlns:a16="http://schemas.microsoft.com/office/drawing/2014/main" id="{51F0A395-2242-4EEC-A87D-3CF732F18B8B}"/>
-              </a:ext>
-            </a:extLst>
-          </p:cNvPr>
-          <p:cNvSpPr>
-            <a:spLocks noGrp="1"/>
-          </p:cNvSpPr>
-          <p:nvPr/>
-        </p:nvSpPr>
-        <p:spPr>
-          <a:xfrm>
-            <a:off x="1162050" y="3848100"/>
-            <a:ext cx="9334500" cy="514350"/>
-          </a:xfrm>
-          <a:prstGeom prst="rect">
-            <a:avLst/>
-          </a:prstGeom>
-          <a:noFill/>
-          <a:ln w="0">
-            <a:noFill/>
-            <a:prstDash val="solid"/>
-          </a:ln>
-        </p:spPr>
-        <p:txBody>
-          <a:bodyPr/>
-          <a:lstStyle/>
-          <a:p>
-            <a:pPr>
-              <a:defRPr sz="1950">
-                <a:solidFill>
-                  <a:srgbClr val="09244D"/>
-                </a:solidFill>
-              </a:defRPr>
-            </a:pPr>
-            <a:r>
-              <a:rPr sz="1950">
-                <a:solidFill>
-                  <a:srgbClr val="09244D"/>
-                </a:solidFill>
-              </a:rPr>
-              <a:t>Écrans adaptés au profil, au mode et à la progression de l’utilisateur.</a:t>
             </a:r>
           </a:p>
         </p:txBody>
